--- a/Salon Veritas Monthly Report — September 2026.pptx
+++ b/Salon Veritas Monthly Report — September 2026.pptx
@@ -5602,7 +5602,7 @@
         <p:spPr>
           <a:xfrm>
             <a:off x="512064" y="1133856"/>
-            <a:ext cx="2645664" cy="640080"/>
+            <a:ext cx="1961388" cy="640080"/>
           </a:xfrm>
           <a:prstGeom prst="roundRect">
             <a:avLst>
@@ -5682,8 +5682,8 @@
         </p:nvSpPr>
         <p:spPr>
           <a:xfrm>
-            <a:off x="3249168" y="1133856"/>
-            <a:ext cx="2645664" cy="640080"/>
+            <a:off x="2564892" y="1133856"/>
+            <a:ext cx="1961388" cy="640080"/>
           </a:xfrm>
           <a:prstGeom prst="roundRect">
             <a:avLst>
@@ -5763,8 +5763,8 @@
         </p:nvSpPr>
         <p:spPr>
           <a:xfrm>
-            <a:off x="5986272" y="1133856"/>
-            <a:ext cx="2645664" cy="640080"/>
+            <a:off x="4617720" y="1133856"/>
+            <a:ext cx="1961388" cy="640080"/>
           </a:xfrm>
           <a:prstGeom prst="roundRect">
             <a:avLst>
@@ -5836,9 +5836,90 @@
           </a:p>
         </p:txBody>
       </p:sp>
+      <p:sp>
+        <p:nvSpPr>
+          <p:cNvPr id="7" name="Rounded Rectangle 6"/>
+          <p:cNvSpPr/>
+          <p:nvPr/>
+        </p:nvSpPr>
+        <p:spPr>
+          <a:xfrm>
+            <a:off x="6670548" y="1133856"/>
+            <a:ext cx="1961388" cy="640080"/>
+          </a:xfrm>
+          <a:prstGeom prst="roundRect">
+            <a:avLst>
+              <a:gd name="adj" fmla="val 8000"/>
+            </a:avLst>
+          </a:prstGeom>
+          <a:solidFill>
+            <a:srgbClr val="FFFFFF"/>
+          </a:solidFill>
+          <a:ln w="9525">
+            <a:solidFill>
+              <a:srgbClr val="E2DBD4"/>
+            </a:solidFill>
+          </a:ln>
+          <a:effectLst/>
+        </p:spPr>
+        <p:style>
+          <a:lnRef idx="1">
+            <a:schemeClr val="accent1"/>
+          </a:lnRef>
+          <a:fillRef idx="3">
+            <a:schemeClr val="accent1"/>
+          </a:fillRef>
+          <a:effectRef idx="2">
+            <a:schemeClr val="accent1"/>
+          </a:effectRef>
+          <a:fontRef idx="minor">
+            <a:schemeClr val="lt1"/>
+          </a:fontRef>
+        </p:style>
+        <p:txBody>
+          <a:bodyPr rtlCol="0" anchor="ctr" wrap="square" tIns="25400" bIns="25400"/>
+          <a:lstStyle/>
+          <a:p>
+            <a:pPr algn="ctr"/>
+            <a:r>
+              <a:rPr sz="900">
+                <a:solidFill>
+                  <a:srgbClr val="6B5F55"/>
+                </a:solidFill>
+                <a:latin typeface="DM Sans"/>
+              </a:rPr>
+              <a:t>Current Followers</a:t>
+            </a:r>
+          </a:p>
+          <a:p>
+            <a:pPr algn="ctr"/>
+            <a:r>
+              <a:rPr sz="2200" b="1">
+                <a:solidFill>
+                  <a:srgbClr val="707252"/>
+                </a:solidFill>
+                <a:latin typeface="DM Sans"/>
+              </a:rPr>
+              <a:t>881</a:t>
+            </a:r>
+          </a:p>
+          <a:p>
+            <a:pPr algn="ctr"/>
+            <a:r>
+              <a:rPr sz="900" b="1">
+                <a:solidFill>
+                  <a:srgbClr val="6B5F55"/>
+                </a:solidFill>
+                <a:latin typeface="DM Sans"/>
+              </a:rPr>
+              <a:t>First snapshot</a:t>
+            </a:r>
+          </a:p>
+        </p:txBody>
+      </p:sp>
       <p:graphicFrame>
         <p:nvGraphicFramePr>
-          <p:cNvPr id="7" name="Table 6"/>
+          <p:cNvPr id="8" name="Table 7"/>
           <p:cNvGraphicFramePr>
             <a:graphicFrameLocks noGrp="1"/>
           </p:cNvGraphicFramePr>
@@ -6748,7 +6829,7 @@
       </p:graphicFrame>
       <p:sp>
         <p:nvSpPr>
-          <p:cNvPr id="8" name="TextBox 7"/>
+          <p:cNvPr id="9" name="TextBox 8"/>
           <p:cNvSpPr txBox="1"/>
           <p:nvPr/>
         </p:nvSpPr>
@@ -6782,7 +6863,7 @@
       </p:sp>
       <p:sp>
         <p:nvSpPr>
-          <p:cNvPr id="9" name="TextBox 8"/>
+          <p:cNvPr id="10" name="TextBox 9"/>
           <p:cNvSpPr txBox="1"/>
           <p:nvPr/>
         </p:nvSpPr>
@@ -6816,7 +6897,7 @@
       </p:sp>
       <p:graphicFrame>
         <p:nvGraphicFramePr>
-          <p:cNvPr id="10" name="Chart 9"/>
+          <p:cNvPr id="11" name="Chart 10"/>
           <p:cNvGraphicFramePr>
             <a:graphicFrameLocks noGrp="1"/>
           </p:cNvGraphicFramePr>
@@ -7991,7 +8072,7 @@
         <p:spPr>
           <a:xfrm>
             <a:off x="512064" y="1133856"/>
-            <a:ext cx="4014216" cy="640080"/>
+            <a:ext cx="2645664" cy="640080"/>
           </a:xfrm>
           <a:prstGeom prst="roundRect">
             <a:avLst>
@@ -8071,8 +8152,8 @@
         </p:nvSpPr>
         <p:spPr>
           <a:xfrm>
-            <a:off x="4617720" y="1133856"/>
-            <a:ext cx="4014216" cy="640080"/>
+            <a:off x="3249168" y="1133856"/>
+            <a:ext cx="2645664" cy="640080"/>
           </a:xfrm>
           <a:prstGeom prst="roundRect">
             <a:avLst>
@@ -8144,9 +8225,90 @@
           </a:p>
         </p:txBody>
       </p:sp>
+      <p:sp>
+        <p:nvSpPr>
+          <p:cNvPr id="6" name="Rounded Rectangle 5"/>
+          <p:cNvSpPr/>
+          <p:nvPr/>
+        </p:nvSpPr>
+        <p:spPr>
+          <a:xfrm>
+            <a:off x="5986272" y="1133856"/>
+            <a:ext cx="2645664" cy="640080"/>
+          </a:xfrm>
+          <a:prstGeom prst="roundRect">
+            <a:avLst>
+              <a:gd name="adj" fmla="val 8000"/>
+            </a:avLst>
+          </a:prstGeom>
+          <a:solidFill>
+            <a:srgbClr val="FFFFFF"/>
+          </a:solidFill>
+          <a:ln w="9525">
+            <a:solidFill>
+              <a:srgbClr val="E2DBD4"/>
+            </a:solidFill>
+          </a:ln>
+          <a:effectLst/>
+        </p:spPr>
+        <p:style>
+          <a:lnRef idx="1">
+            <a:schemeClr val="accent1"/>
+          </a:lnRef>
+          <a:fillRef idx="3">
+            <a:schemeClr val="accent1"/>
+          </a:fillRef>
+          <a:effectRef idx="2">
+            <a:schemeClr val="accent1"/>
+          </a:effectRef>
+          <a:fontRef idx="minor">
+            <a:schemeClr val="lt1"/>
+          </a:fontRef>
+        </p:style>
+        <p:txBody>
+          <a:bodyPr rtlCol="0" anchor="ctr" wrap="square" tIns="25400" bIns="25400"/>
+          <a:lstStyle/>
+          <a:p>
+            <a:pPr algn="ctr"/>
+            <a:r>
+              <a:rPr sz="900">
+                <a:solidFill>
+                  <a:srgbClr val="6B5F55"/>
+                </a:solidFill>
+                <a:latin typeface="DM Sans"/>
+              </a:rPr>
+              <a:t>Current Followers</a:t>
+            </a:r>
+          </a:p>
+          <a:p>
+            <a:pPr algn="ctr"/>
+            <a:r>
+              <a:rPr sz="2200" b="1">
+                <a:solidFill>
+                  <a:srgbClr val="707252"/>
+                </a:solidFill>
+                <a:latin typeface="DM Sans"/>
+              </a:rPr>
+              <a:t>870</a:t>
+            </a:r>
+          </a:p>
+          <a:p>
+            <a:pPr algn="ctr"/>
+            <a:r>
+              <a:rPr sz="900" b="1">
+                <a:solidFill>
+                  <a:srgbClr val="6B5F55"/>
+                </a:solidFill>
+                <a:latin typeface="DM Sans"/>
+              </a:rPr>
+              <a:t>First snapshot</a:t>
+            </a:r>
+          </a:p>
+        </p:txBody>
+      </p:sp>
       <p:graphicFrame>
         <p:nvGraphicFramePr>
-          <p:cNvPr id="6" name="Table 5"/>
+          <p:cNvPr id="7" name="Table 6"/>
           <p:cNvGraphicFramePr>
             <a:graphicFrameLocks noGrp="1"/>
           </p:cNvGraphicFramePr>
@@ -8958,7 +9120,7 @@
       </p:graphicFrame>
       <p:sp>
         <p:nvSpPr>
-          <p:cNvPr id="7" name="TextBox 6"/>
+          <p:cNvPr id="8" name="TextBox 7"/>
           <p:cNvSpPr txBox="1"/>
           <p:nvPr/>
         </p:nvSpPr>
@@ -8992,7 +9154,7 @@
       </p:sp>
       <p:sp>
         <p:nvSpPr>
-          <p:cNvPr id="8" name="TextBox 7"/>
+          <p:cNvPr id="9" name="TextBox 8"/>
           <p:cNvSpPr txBox="1"/>
           <p:nvPr/>
         </p:nvSpPr>
@@ -9026,7 +9188,7 @@
       </p:sp>
       <p:graphicFrame>
         <p:nvGraphicFramePr>
-          <p:cNvPr id="9" name="Chart 8"/>
+          <p:cNvPr id="10" name="Chart 9"/>
           <p:cNvGraphicFramePr>
             <a:graphicFrameLocks noGrp="1"/>
           </p:cNvGraphicFramePr>

--- a/Salon Veritas Monthly Report — September 2026.pptx
+++ b/Salon Veritas Monthly Report — September 2026.pptx
@@ -264,7 +264,7 @@
                   <c:v>0</c:v>
                 </c:pt>
                 <c:pt idx="3">
-                  <c:v>270</c:v>
+                  <c:v>0</c:v>
                 </c:pt>
                 <c:pt idx="4">
                   <c:v>0</c:v>
@@ -282,67 +282,67 @@
                   <c:v>0</c:v>
                 </c:pt>
                 <c:pt idx="9">
-                  <c:v>0</c:v>
+                  <c:v>2150</c:v>
                 </c:pt>
                 <c:pt idx="10">
                   <c:v>0</c:v>
                 </c:pt>
                 <c:pt idx="11">
-                  <c:v>0</c:v>
+                  <c:v>193</c:v>
                 </c:pt>
                 <c:pt idx="12">
                   <c:v>0</c:v>
                 </c:pt>
                 <c:pt idx="13">
-                  <c:v>2150</c:v>
+                  <c:v>0</c:v>
                 </c:pt>
                 <c:pt idx="14">
-                  <c:v>0</c:v>
+                  <c:v>5374</c:v>
                 </c:pt>
                 <c:pt idx="15">
-                  <c:v>193</c:v>
+                  <c:v>0</c:v>
                 </c:pt>
                 <c:pt idx="16">
                   <c:v>0</c:v>
                 </c:pt>
                 <c:pt idx="17">
-                  <c:v>0</c:v>
+                  <c:v>391</c:v>
                 </c:pt>
                 <c:pt idx="18">
-                  <c:v>5367</c:v>
+                  <c:v>0</c:v>
                 </c:pt>
                 <c:pt idx="19">
                   <c:v>0</c:v>
                 </c:pt>
                 <c:pt idx="20">
-                  <c:v>0</c:v>
+                  <c:v>246</c:v>
                 </c:pt>
                 <c:pt idx="21">
-                  <c:v>381</c:v>
+                  <c:v>0</c:v>
                 </c:pt>
                 <c:pt idx="22">
                   <c:v>0</c:v>
                 </c:pt>
                 <c:pt idx="23">
-                  <c:v>0</c:v>
+                  <c:v>259</c:v>
                 </c:pt>
                 <c:pt idx="24">
-                  <c:v>227</c:v>
+                  <c:v>0</c:v>
                 </c:pt>
                 <c:pt idx="25">
-                  <c:v>0</c:v>
+                  <c:v>202</c:v>
                 </c:pt>
                 <c:pt idx="26">
                   <c:v>0</c:v>
                 </c:pt>
                 <c:pt idx="27">
-                  <c:v>210</c:v>
+                  <c:v>0</c:v>
                 </c:pt>
                 <c:pt idx="28">
-                  <c:v>0</c:v>
+                  <c:v>163</c:v>
                 </c:pt>
                 <c:pt idx="29">
-                  <c:v>170</c:v>
+                  <c:v>0</c:v>
                 </c:pt>
               </c:numCache>
             </c:numRef>
@@ -535,28 +535,28 @@
                   <c:v>0</c:v>
                 </c:pt>
                 <c:pt idx="19">
-                  <c:v>0</c:v>
+                  <c:v>609</c:v>
                 </c:pt>
                 <c:pt idx="20">
                   <c:v>0</c:v>
                 </c:pt>
                 <c:pt idx="21">
-                  <c:v>609</c:v>
+                  <c:v>254</c:v>
                 </c:pt>
                 <c:pt idx="22">
                   <c:v>0</c:v>
                 </c:pt>
                 <c:pt idx="23">
-                  <c:v>254</c:v>
+                  <c:v>0</c:v>
                 </c:pt>
                 <c:pt idx="24">
-                  <c:v>0</c:v>
+                  <c:v>427</c:v>
                 </c:pt>
                 <c:pt idx="25">
                   <c:v>0</c:v>
                 </c:pt>
                 <c:pt idx="26">
-                  <c:v>427</c:v>
+                  <c:v>0</c:v>
                 </c:pt>
                 <c:pt idx="27">
                   <c:v>0</c:v>
@@ -565,7 +565,7 @@
                   <c:v>0</c:v>
                 </c:pt>
                 <c:pt idx="29">
-                  <c:v>0</c:v>
+                  <c:v>270</c:v>
                 </c:pt>
               </c:numCache>
             </c:numRef>
@@ -865,7 +865,7 @@
                   <c:v>0</c:v>
                 </c:pt>
                 <c:pt idx="11">
-                  <c:v>0</c:v>
+                  <c:v>257</c:v>
                 </c:pt>
                 <c:pt idx="12">
                   <c:v>0</c:v>
@@ -874,10 +874,10 @@
                   <c:v>0</c:v>
                 </c:pt>
                 <c:pt idx="14">
-                  <c:v>0</c:v>
+                  <c:v>304</c:v>
                 </c:pt>
                 <c:pt idx="15">
-                  <c:v>257</c:v>
+                  <c:v>0</c:v>
                 </c:pt>
                 <c:pt idx="16">
                   <c:v>0</c:v>
@@ -886,13 +886,13 @@
                   <c:v>0</c:v>
                 </c:pt>
                 <c:pt idx="18">
-                  <c:v>303</c:v>
+                  <c:v>0</c:v>
                 </c:pt>
                 <c:pt idx="19">
                   <c:v>0</c:v>
                 </c:pt>
                 <c:pt idx="20">
-                  <c:v>0</c:v>
+                  <c:v>123</c:v>
                 </c:pt>
                 <c:pt idx="21">
                   <c:v>0</c:v>
@@ -901,25 +901,25 @@
                   <c:v>0</c:v>
                 </c:pt>
                 <c:pt idx="23">
-                  <c:v>0</c:v>
+                  <c:v>75</c:v>
                 </c:pt>
                 <c:pt idx="24">
-                  <c:v>123</c:v>
+                  <c:v>0</c:v>
                 </c:pt>
                 <c:pt idx="25">
-                  <c:v>0</c:v>
+                  <c:v>18</c:v>
                 </c:pt>
                 <c:pt idx="26">
                   <c:v>0</c:v>
                 </c:pt>
                 <c:pt idx="27">
-                  <c:v>70</c:v>
+                  <c:v>0</c:v>
                 </c:pt>
                 <c:pt idx="28">
-                  <c:v>0</c:v>
+                  <c:v>52</c:v>
                 </c:pt>
                 <c:pt idx="29">
-                  <c:v>10</c:v>
+                  <c:v>0</c:v>
                 </c:pt>
               </c:numCache>
             </c:numRef>
@@ -1082,7 +1082,7 @@
                   <c:v>0</c:v>
                 </c:pt>
                 <c:pt idx="9">
-                  <c:v>0</c:v>
+                  <c:v>117</c:v>
                 </c:pt>
                 <c:pt idx="10">
                   <c:v>0</c:v>
@@ -1094,7 +1094,7 @@
                   <c:v>0</c:v>
                 </c:pt>
                 <c:pt idx="13">
-                  <c:v>117</c:v>
+                  <c:v>248</c:v>
                 </c:pt>
                 <c:pt idx="14">
                   <c:v>0</c:v>
@@ -1106,13 +1106,13 @@
                   <c:v>0</c:v>
                 </c:pt>
                 <c:pt idx="17">
-                  <c:v>248</c:v>
+                  <c:v>0</c:v>
                 </c:pt>
                 <c:pt idx="18">
                   <c:v>0</c:v>
                 </c:pt>
                 <c:pt idx="19">
-                  <c:v>0</c:v>
+                  <c:v>47</c:v>
                 </c:pt>
                 <c:pt idx="20">
                   <c:v>0</c:v>
@@ -1124,7 +1124,7 @@
                   <c:v>0</c:v>
                 </c:pt>
                 <c:pt idx="23">
-                  <c:v>47</c:v>
+                  <c:v>0</c:v>
                 </c:pt>
                 <c:pt idx="24">
                   <c:v>0</c:v>
@@ -1436,25 +1436,25 @@
                   <c:v>0</c:v>
                 </c:pt>
                 <c:pt idx="9">
-                  <c:v>0</c:v>
+                  <c:v>169</c:v>
                 </c:pt>
                 <c:pt idx="10">
                   <c:v>0</c:v>
                 </c:pt>
                 <c:pt idx="11">
-                  <c:v>0</c:v>
+                  <c:v>137</c:v>
                 </c:pt>
                 <c:pt idx="12">
                   <c:v>0</c:v>
                 </c:pt>
                 <c:pt idx="13">
-                  <c:v>165</c:v>
+                  <c:v>0</c:v>
                 </c:pt>
                 <c:pt idx="14">
-                  <c:v>0</c:v>
+                  <c:v>1060</c:v>
                 </c:pt>
                 <c:pt idx="15">
-                  <c:v>137</c:v>
+                  <c:v>0</c:v>
                 </c:pt>
                 <c:pt idx="16">
                   <c:v>0</c:v>
@@ -1463,13 +1463,13 @@
                   <c:v>0</c:v>
                 </c:pt>
                 <c:pt idx="18">
-                  <c:v>1054</c:v>
+                  <c:v>0</c:v>
                 </c:pt>
                 <c:pt idx="19">
                   <c:v>0</c:v>
                 </c:pt>
                 <c:pt idx="20">
-                  <c:v>0</c:v>
+                  <c:v>119</c:v>
                 </c:pt>
                 <c:pt idx="21">
                   <c:v>0</c:v>
@@ -1478,25 +1478,25 @@
                   <c:v>0</c:v>
                 </c:pt>
                 <c:pt idx="23">
-                  <c:v>0</c:v>
+                  <c:v>113</c:v>
                 </c:pt>
                 <c:pt idx="24">
-                  <c:v>119</c:v>
+                  <c:v>0</c:v>
                 </c:pt>
                 <c:pt idx="25">
-                  <c:v>0</c:v>
+                  <c:v>91</c:v>
                 </c:pt>
                 <c:pt idx="26">
                   <c:v>0</c:v>
                 </c:pt>
                 <c:pt idx="27">
-                  <c:v>108</c:v>
+                  <c:v>0</c:v>
                 </c:pt>
                 <c:pt idx="28">
-                  <c:v>0</c:v>
+                  <c:v>115</c:v>
                 </c:pt>
                 <c:pt idx="29">
-                  <c:v>82</c:v>
+                  <c:v>0</c:v>
                 </c:pt>
               </c:numCache>
             </c:numRef>
@@ -1632,22 +1632,22 @@
                 <c:formatCode>General</c:formatCode>
                 <c:ptCount val="30"/>
                 <c:pt idx="0">
-                  <c:v>0</c:v>
+                  <c:v>1858</c:v>
                 </c:pt>
                 <c:pt idx="1">
-                  <c:v>0</c:v>
+                  <c:v>643</c:v>
                 </c:pt>
                 <c:pt idx="2">
-                  <c:v>3495</c:v>
+                  <c:v>0</c:v>
                 </c:pt>
                 <c:pt idx="3">
-                  <c:v>885</c:v>
+                  <c:v>0</c:v>
                 </c:pt>
                 <c:pt idx="4">
-                  <c:v>1855</c:v>
+                  <c:v>122</c:v>
                 </c:pt>
                 <c:pt idx="5">
-                  <c:v>643</c:v>
+                  <c:v>0</c:v>
                 </c:pt>
                 <c:pt idx="6">
                   <c:v>0</c:v>
@@ -1656,10 +1656,10 @@
                   <c:v>0</c:v>
                 </c:pt>
                 <c:pt idx="8">
-                  <c:v>122</c:v>
+                  <c:v>0</c:v>
                 </c:pt>
                 <c:pt idx="9">
-                  <c:v>0</c:v>
+                  <c:v>746</c:v>
                 </c:pt>
                 <c:pt idx="10">
                   <c:v>0</c:v>
@@ -1671,7 +1671,7 @@
                   <c:v>0</c:v>
                 </c:pt>
                 <c:pt idx="13">
-                  <c:v>743</c:v>
+                  <c:v>197</c:v>
                 </c:pt>
                 <c:pt idx="14">
                   <c:v>0</c:v>
@@ -1683,13 +1683,13 @@
                   <c:v>0</c:v>
                 </c:pt>
                 <c:pt idx="17">
-                  <c:v>195</c:v>
+                  <c:v>0</c:v>
                 </c:pt>
                 <c:pt idx="18">
                   <c:v>0</c:v>
                 </c:pt>
                 <c:pt idx="19">
-                  <c:v>0</c:v>
+                  <c:v>110</c:v>
                 </c:pt>
                 <c:pt idx="20">
                   <c:v>0</c:v>
@@ -1701,7 +1701,7 @@
                   <c:v>0</c:v>
                 </c:pt>
                 <c:pt idx="23">
-                  <c:v>110</c:v>
+                  <c:v>0</c:v>
                 </c:pt>
                 <c:pt idx="24">
                   <c:v>0</c:v>
@@ -5422,7 +5422,7 @@
                 </a:solidFill>
                 <a:latin typeface="DM Sans"/>
               </a:rPr>
-              <a:t>Restore TikTok posting cadence — down 60% this period (6 vs. 15 posts). Aim for 15+ posts next period.</a:t>
+              <a:t>Restore TikTok posting cadence — down 30% this period (7 vs. 10 posts). Aim for 10+ posts next period.</a:t>
             </a:r>
           </a:p>
           <a:p>
@@ -5669,7 +5669,7 @@
                 </a:solidFill>
                 <a:latin typeface="DM Sans"/>
               </a:rPr>
-              <a:t>↑ new activity (low base: 1.3K→9.0K)</a:t>
+              <a:t>↑ new activity (low base: 1.6K→9.0K)</a:t>
             </a:r>
           </a:p>
         </p:txBody>
@@ -5738,7 +5738,7 @@
                 </a:solidFill>
                 <a:latin typeface="DM Sans"/>
               </a:rPr>
-              <a:t>6.9K</a:t>
+              <a:t>7.0K</a:t>
             </a:r>
           </a:p>
           <a:p>
@@ -5750,7 +5750,7 @@
                 </a:solidFill>
                 <a:latin typeface="DM Sans"/>
               </a:rPr>
-              <a:t>↑ new activity (low base: 807→6.9K)</a:t>
+              <a:t>↑ new activity (low base: 926→7.0K)</a:t>
             </a:r>
           </a:p>
         </p:txBody>
@@ -5831,7 +5831,7 @@
                 </a:solidFill>
                 <a:latin typeface="DM Sans"/>
               </a:rPr>
-              <a:t>↓ -82.9%</a:t>
+              <a:t>↓ -83.6%</a:t>
             </a:r>
           </a:p>
         </p:txBody>
@@ -5900,7 +5900,7 @@
                 </a:solidFill>
                 <a:latin typeface="DM Sans"/>
               </a:rPr>
-              <a:t>881</a:t>
+              <a:t>880</a:t>
             </a:r>
           </a:p>
           <a:p>
@@ -5908,11 +5908,11 @@
             <a:r>
               <a:rPr sz="900" b="1">
                 <a:solidFill>
-                  <a:srgbClr val="6B5F55"/>
+                  <a:srgbClr val="8A7E74"/>
                 </a:solidFill>
                 <a:latin typeface="DM Sans"/>
               </a:rPr>
-              <a:t>First snapshot</a:t>
+              <a:t>↓ -0.1%</a:t>
             </a:r>
           </a:p>
         </p:txBody>
@@ -6102,7 +6102,7 @@
                         </a:defRPr>
                       </a:pPr>
                       <a:r>
-                        <a:t>6</a:t>
+                        <a:t>7</a:t>
                       </a:r>
                     </a:p>
                   </a:txBody>
@@ -6126,7 +6126,7 @@
                         </a:defRPr>
                       </a:pPr>
                       <a:r>
-                        <a:t>↑ +83.3%</a:t>
+                        <a:t>↑ +57.1%</a:t>
                       </a:r>
                     </a:p>
                   </a:txBody>
@@ -6200,7 +6200,7 @@
                         </a:defRPr>
                       </a:pPr>
                       <a:r>
-                        <a:t>1.3K</a:t>
+                        <a:t>1.6K</a:t>
                       </a:r>
                     </a:p>
                   </a:txBody>
@@ -6224,7 +6224,7 @@
                         </a:defRPr>
                       </a:pPr>
                       <a:r>
-                        <a:t>↑ new activity (low base: 1.3K→9.0K)</a:t>
+                        <a:t>↑ new activity (low base: 1.6K→9.0K)</a:t>
                       </a:r>
                     </a:p>
                   </a:txBody>
@@ -6274,7 +6274,7 @@
                         </a:defRPr>
                       </a:pPr>
                       <a:r>
-                        <a:t>6.9K</a:t>
+                        <a:t>7.0K</a:t>
                       </a:r>
                     </a:p>
                   </a:txBody>
@@ -6298,7 +6298,7 @@
                         </a:defRPr>
                       </a:pPr>
                       <a:r>
-                        <a:t>807</a:t>
+                        <a:t>926</a:t>
                       </a:r>
                     </a:p>
                   </a:txBody>
@@ -6322,7 +6322,7 @@
                         </a:defRPr>
                       </a:pPr>
                       <a:r>
-                        <a:t>↑ new activity (low base: 807→6.9K)</a:t>
+                        <a:t>↑ new activity (low base: 926→7.0K)</a:t>
                       </a:r>
                     </a:p>
                   </a:txBody>
@@ -6396,7 +6396,7 @@
                         </a:defRPr>
                       </a:pPr>
                       <a:r>
-                        <a:t>53</a:t>
+                        <a:t>63</a:t>
                       </a:r>
                     </a:p>
                   </a:txBody>
@@ -6420,7 +6420,7 @@
                         </a:defRPr>
                       </a:pPr>
                       <a:r>
-                        <a:t>↑ +35.8%</a:t>
+                        <a:t>↑ +14.3%</a:t>
                       </a:r>
                     </a:p>
                   </a:txBody>
@@ -6494,7 +6494,7 @@
                         </a:defRPr>
                       </a:pPr>
                       <a:r>
-                        <a:t>2</a:t>
+                        <a:t>3</a:t>
                       </a:r>
                     </a:p>
                   </a:txBody>
@@ -6518,7 +6518,7 @@
                         </a:defRPr>
                       </a:pPr>
                       <a:r>
-                        <a:t>↑ new activity (low base: 2→10)</a:t>
+                        <a:t>↑ +233.3%</a:t>
                       </a:r>
                     </a:p>
                   </a:txBody>
@@ -6788,7 +6788,7 @@
                         </a:defRPr>
                       </a:pPr>
                       <a:r>
-                        <a:t>7.06%</a:t>
+                        <a:t>7.34%</a:t>
                       </a:r>
                     </a:p>
                   </a:txBody>
@@ -6812,7 +6812,7 @@
                         </a:defRPr>
                       </a:pPr>
                       <a:r>
-                        <a:t>↓ -82.9%</a:t>
+                        <a:t>↓ -83.6%</a:t>
                       </a:r>
                     </a:p>
                   </a:txBody>
@@ -6856,7 +6856,7 @@
                 </a:solidFill>
                 <a:latin typeface="DM Sans"/>
               </a:rPr>
-              <a:t>Shares, Engagement Rate softened despite posting volume increasing (11 vs. 6 posts).</a:t>
+              <a:t>Shares, Engagement Rate softened despite posting volume increasing (11 vs. 7 posts).</a:t>
             </a:r>
           </a:p>
         </p:txBody>
@@ -7588,7 +7588,7 @@
                         </a:defRPr>
                       </a:pPr>
                       <a:r>
-                        <a:t>277</a:t>
+                        <a:t>287</a:t>
                       </a:r>
                     </a:p>
                   </a:txBody>
@@ -7612,7 +7612,7 @@
                         </a:defRPr>
                       </a:pPr>
                       <a:r>
-                        <a:t>8</a:t>
+                        <a:t>9</a:t>
                       </a:r>
                     </a:p>
                   </a:txBody>
@@ -7686,7 +7686,7 @@
                         </a:defRPr>
                       </a:pPr>
                       <a:r>
-                        <a:t>Happy Birthday to my sister from another Mr. I love you 😘 my ride or die 🫣🤷🏻‍♀️🎂</a:t>
+                        <a:t>A full balayage, a soft blonde smudge at the root, finished with a long, layered, angled cut. This is what we love most: color and cut working together, not as two separate servic…</a:t>
                       </a:r>
                     </a:p>
                   </a:txBody>
@@ -7710,7 +7710,7 @@
                         </a:defRPr>
                       </a:pPr>
                       <a:r>
-                        <a:t>Aug 15</a:t>
+                        <a:t>Sep 08</a:t>
                       </a:r>
                     </a:p>
                   </a:txBody>
@@ -7734,7 +7734,7 @@
                         </a:defRPr>
                       </a:pPr>
                       <a:r>
-                        <a:t>270</a:t>
+                        <a:t>259</a:t>
                       </a:r>
                     </a:p>
                   </a:txBody>
@@ -7758,7 +7758,7 @@
                         </a:defRPr>
                       </a:pPr>
                       <a:r>
-                        <a:t>10</a:t>
+                        <a:t>13</a:t>
                       </a:r>
                     </a:p>
                   </a:txBody>
@@ -7782,7 +7782,7 @@
                         </a:defRPr>
                       </a:pPr>
                       <a:r>
-                        <a:t>1</a:t>
+                        <a:t>0</a:t>
                       </a:r>
                     </a:p>
                   </a:txBody>
@@ -7880,7 +7880,7 @@
                         </a:defRPr>
                       </a:pPr>
                       <a:r>
-                        <a:t>227</a:t>
+                        <a:t>246</a:t>
                       </a:r>
                     </a:p>
                   </a:txBody>
@@ -8127,7 +8127,7 @@
                 </a:solidFill>
                 <a:latin typeface="DM Sans"/>
               </a:rPr>
-              <a:t>763</a:t>
+              <a:t>829</a:t>
             </a:r>
           </a:p>
           <a:p>
@@ -8139,7 +8139,7 @@
                 </a:solidFill>
                 <a:latin typeface="DM Sans"/>
               </a:rPr>
-              <a:t>↑ +85.2%</a:t>
+              <a:t>↑ +101.2%</a:t>
             </a:r>
           </a:p>
         </p:txBody>
@@ -8289,7 +8289,7 @@
                 </a:solidFill>
                 <a:latin typeface="DM Sans"/>
               </a:rPr>
-              <a:t>870</a:t>
+              <a:t>869</a:t>
             </a:r>
           </a:p>
           <a:p>
@@ -8297,11 +8297,11 @@
             <a:r>
               <a:rPr sz="900" b="1">
                 <a:solidFill>
-                  <a:srgbClr val="6B5F55"/>
+                  <a:srgbClr val="8A7E74"/>
                 </a:solidFill>
                 <a:latin typeface="DM Sans"/>
               </a:rPr>
-              <a:t>First snapshot</a:t>
+              <a:t>↓ -0.1%</a:t>
             </a:r>
           </a:p>
         </p:txBody>
@@ -8467,7 +8467,7 @@
                         </a:defRPr>
                       </a:pPr>
                       <a:r>
-                        <a:t>8</a:t>
+                        <a:t>9</a:t>
                       </a:r>
                     </a:p>
                   </a:txBody>
@@ -8515,7 +8515,7 @@
                         </a:defRPr>
                       </a:pPr>
                       <a:r>
-                        <a:t>↑ +166.7%</a:t>
+                        <a:t>↑ +200.0%</a:t>
                       </a:r>
                     </a:p>
                   </a:txBody>
@@ -8565,7 +8565,7 @@
                         </a:defRPr>
                       </a:pPr>
                       <a:r>
-                        <a:t>763</a:t>
+                        <a:t>829</a:t>
                       </a:r>
                     </a:p>
                   </a:txBody>
@@ -8613,7 +8613,7 @@
                         </a:defRPr>
                       </a:pPr>
                       <a:r>
-                        <a:t>↑ +85.2%</a:t>
+                        <a:t>↑ +101.2%</a:t>
                       </a:r>
                     </a:p>
                   </a:txBody>
@@ -8957,7 +8957,7 @@
                         </a:defRPr>
                       </a:pPr>
                       <a:r>
-                        <a:t>5</a:t>
+                        <a:t>9</a:t>
                       </a:r>
                     </a:p>
                   </a:txBody>
@@ -8999,13 +8999,13 @@
                       <a:pPr>
                         <a:defRPr sz="800">
                           <a:solidFill>
-                            <a:srgbClr val="8A7E74"/>
-                          </a:solidFill>
-                          <a:latin typeface="DM Sans"/>
-                        </a:defRPr>
-                      </a:pPr>
-                      <a:r>
-                        <a:t>↓ -28.6%</a:t>
+                            <a:srgbClr val="B8965A"/>
+                          </a:solidFill>
+                          <a:latin typeface="DM Sans"/>
+                        </a:defRPr>
+                      </a:pPr>
+                      <a:r>
+                        <a:t>↑ +28.6%</a:t>
                       </a:r>
                     </a:p>
                   </a:txBody>
@@ -9147,7 +9147,7 @@
                 </a:solidFill>
                 <a:latin typeface="DM Sans"/>
               </a:rPr>
-              <a:t>Reactions, Clicks, Engagement Rate softened despite posting volume increasing (8 vs. 3 posts).</a:t>
+              <a:t>Reactions, Engagement Rate softened despite posting volume increasing (9 vs. 3 posts).</a:t>
             </a:r>
           </a:p>
         </p:txBody>
@@ -9338,7 +9338,7 @@
                 </a:solidFill>
                 <a:latin typeface="DM Sans"/>
               </a:rPr>
-              <a:t>40%</a:t>
+              <a:t>37%</a:t>
             </a:r>
             <a:r>
               <a:rPr sz="1400" b="0">
@@ -9587,7 +9587,7 @@
                         </a:defRPr>
                       </a:pPr>
                       <a:r>
-                        <a:t>303</a:t>
+                        <a:t>304</a:t>
                       </a:r>
                     </a:p>
                   </a:txBody>
@@ -10025,7 +10025,7 @@
                         </a:defRPr>
                       </a:pPr>
                       <a:r>
-                        <a:t>70</a:t>
+                        <a:t>75</a:t>
                       </a:r>
                     </a:p>
                   </a:txBody>
@@ -10123,7 +10123,7 @@
                         </a:defRPr>
                       </a:pPr>
                       <a:r>
-                        <a:t>Six years. Some of our guests have been with us longer than most relationships last. What we hear most isn't just about the color, though that matters too. It's about walking in a…</a:t>
+                        <a:t>A classic French twist, done properly. There's a reason this style has never gone out of fashion. It's polished without trying too hard, elegant without being fussy, and it holds…</a:t>
                       </a:r>
                     </a:p>
                   </a:txBody>
@@ -10147,7 +10147,7 @@
                         </a:defRPr>
                       </a:pPr>
                       <a:r>
-                        <a:t>Sep 10</a:t>
+                        <a:t>Sep 13</a:t>
                       </a:r>
                     </a:p>
                   </a:txBody>
@@ -10171,7 +10171,7 @@
                         </a:defRPr>
                       </a:pPr>
                       <a:r>
-                        <a:t>10</a:t>
+                        <a:t>52</a:t>
                       </a:r>
                     </a:p>
                   </a:txBody>
@@ -10195,7 +10195,7 @@
                         </a:defRPr>
                       </a:pPr>
                       <a:r>
-                        <a:t>3</a:t>
+                        <a:t>0</a:t>
                       </a:r>
                     </a:p>
                   </a:txBody>
@@ -10418,7 +10418,7 @@
                 </a:solidFill>
                 <a:latin typeface="DM Sans"/>
               </a:rPr>
-              <a:t>1.7K</a:t>
+              <a:t>1.8K</a:t>
             </a:r>
           </a:p>
           <a:p>
@@ -10430,7 +10430,7 @@
                 </a:solidFill>
                 <a:latin typeface="DM Sans"/>
               </a:rPr>
-              <a:t>↓ -79.3%</a:t>
+              <a:t>↓ -50.9%</a:t>
             </a:r>
           </a:p>
         </p:txBody>
@@ -10499,7 +10499,7 @@
                 </a:solidFill>
                 <a:latin typeface="DM Sans"/>
               </a:rPr>
-              <a:t>1.4K</a:t>
+              <a:t>1.5K</a:t>
             </a:r>
           </a:p>
           <a:p>
@@ -10511,7 +10511,7 @@
                 </a:solidFill>
                 <a:latin typeface="DM Sans"/>
               </a:rPr>
-              <a:t>↓ -80.4%</a:t>
+              <a:t>↓ -53.7%</a:t>
             </a:r>
           </a:p>
         </p:txBody>
@@ -10580,7 +10580,7 @@
                 </a:solidFill>
                 <a:latin typeface="DM Sans"/>
               </a:rPr>
-              <a:t>1.75%</a:t>
+              <a:t>1.63%</a:t>
             </a:r>
           </a:p>
           <a:p>
@@ -10588,11 +10588,11 @@
             <a:r>
               <a:rPr sz="900" b="1">
                 <a:solidFill>
-                  <a:srgbClr val="B8965A"/>
+                  <a:srgbClr val="8A7E74"/>
                 </a:solidFill>
                 <a:latin typeface="DM Sans"/>
               </a:rPr>
-              <a:t>↑ +3.0%</a:t>
+              <a:t>↓ -35.7%</a:t>
             </a:r>
           </a:p>
         </p:txBody>
@@ -10839,7 +10839,7 @@
                         </a:defRPr>
                       </a:pPr>
                       <a:r>
-                        <a:t>6</a:t>
+                        <a:t>7</a:t>
                       </a:r>
                     </a:p>
                   </a:txBody>
@@ -10863,7 +10863,7 @@
                         </a:defRPr>
                       </a:pPr>
                       <a:r>
-                        <a:t>15</a:t>
+                        <a:t>10</a:t>
                       </a:r>
                     </a:p>
                   </a:txBody>
@@ -10887,7 +10887,7 @@
                         </a:defRPr>
                       </a:pPr>
                       <a:r>
-                        <a:t>↓ -60.0%</a:t>
+                        <a:t>↓ -30.0%</a:t>
                       </a:r>
                     </a:p>
                   </a:txBody>
@@ -10937,7 +10937,7 @@
                         </a:defRPr>
                       </a:pPr>
                       <a:r>
-                        <a:t>1.7K</a:t>
+                        <a:t>1.8K</a:t>
                       </a:r>
                     </a:p>
                   </a:txBody>
@@ -10961,7 +10961,7 @@
                         </a:defRPr>
                       </a:pPr>
                       <a:r>
-                        <a:t>8.0K</a:t>
+                        <a:t>3.7K</a:t>
                       </a:r>
                     </a:p>
                   </a:txBody>
@@ -10985,7 +10985,7 @@
                         </a:defRPr>
                       </a:pPr>
                       <a:r>
-                        <a:t>↓ -79.3%</a:t>
+                        <a:t>↓ -50.9%</a:t>
                       </a:r>
                     </a:p>
                   </a:txBody>
@@ -11035,7 +11035,7 @@
                         </a:defRPr>
                       </a:pPr>
                       <a:r>
-                        <a:t>1.4K</a:t>
+                        <a:t>1.5K</a:t>
                       </a:r>
                     </a:p>
                   </a:txBody>
@@ -11059,7 +11059,7 @@
                         </a:defRPr>
                       </a:pPr>
                       <a:r>
-                        <a:t>7.3K</a:t>
+                        <a:t>3.3K</a:t>
                       </a:r>
                     </a:p>
                   </a:txBody>
@@ -11083,7 +11083,7 @@
                         </a:defRPr>
                       </a:pPr>
                       <a:r>
-                        <a:t>↓ -80.4%</a:t>
+                        <a:t>↓ -53.7%</a:t>
                       </a:r>
                     </a:p>
                   </a:txBody>
@@ -11157,7 +11157,7 @@
                         </a:defRPr>
                       </a:pPr>
                       <a:r>
-                        <a:t>108</a:t>
+                        <a:t>72</a:t>
                       </a:r>
                     </a:p>
                   </a:txBody>
@@ -11181,7 +11181,7 @@
                         </a:defRPr>
                       </a:pPr>
                       <a:r>
-                        <a:t>↓ -77.8%</a:t>
+                        <a:t>↓ -66.7%</a:t>
                       </a:r>
                     </a:p>
                   </a:txBody>
@@ -11255,7 +11255,7 @@
                         </a:defRPr>
                       </a:pPr>
                       <a:r>
-                        <a:t>15</a:t>
+                        <a:t>11</a:t>
                       </a:r>
                     </a:p>
                   </a:txBody>
@@ -11279,7 +11279,7 @@
                         </a:defRPr>
                       </a:pPr>
                       <a:r>
-                        <a:t>↓ -93.3%</a:t>
+                        <a:t>↓ -90.9%</a:t>
                       </a:r>
                     </a:p>
                   </a:txBody>
@@ -11427,7 +11427,7 @@
                         </a:defRPr>
                       </a:pPr>
                       <a:r>
-                        <a:t>1.75%</a:t>
+                        <a:t>1.63%</a:t>
                       </a:r>
                     </a:p>
                   </a:txBody>
@@ -11451,7 +11451,7 @@
                         </a:defRPr>
                       </a:pPr>
                       <a:r>
-                        <a:t>1.70%</a:t>
+                        <a:t>2.54%</a:t>
                       </a:r>
                     </a:p>
                   </a:txBody>
@@ -11469,13 +11469,13 @@
                       <a:pPr>
                         <a:defRPr sz="800">
                           <a:solidFill>
-                            <a:srgbClr val="B8965A"/>
-                          </a:solidFill>
-                          <a:latin typeface="DM Sans"/>
-                        </a:defRPr>
-                      </a:pPr>
-                      <a:r>
-                        <a:t>↑ +3.0%</a:t>
+                            <a:srgbClr val="8A7E74"/>
+                          </a:solidFill>
+                          <a:latin typeface="DM Sans"/>
+                        </a:defRPr>
+                      </a:pPr>
+                      <a:r>
+                        <a:t>↓ -35.7%</a:t>
                       </a:r>
                     </a:p>
                   </a:txBody>
@@ -11519,7 +11519,7 @@
                 </a:solidFill>
                 <a:latin typeface="DM Sans"/>
               </a:rPr>
-              <a:t>Most metrics are down this period alongside a 60% drop in posting frequency (6 vs. 15 posts).</a:t>
+              <a:t>Most metrics are down this period alongside a 30% drop in posting frequency (7 vs. 10 posts).</a:t>
             </a:r>
           </a:p>
         </p:txBody>
@@ -11710,7 +11710,7 @@
                 </a:solidFill>
                 <a:latin typeface="DM Sans"/>
               </a:rPr>
-              <a:t>63%</a:t>
+              <a:t>59%</a:t>
             </a:r>
             <a:r>
               <a:rPr sz="1400" b="0">
@@ -12105,7 +12105,7 @@
                         </a:defRPr>
                       </a:pPr>
                       <a:r>
-                        <a:t>165</a:t>
+                        <a:t>169</a:t>
                       </a:r>
                     </a:p>
                   </a:txBody>
@@ -12495,7 +12495,7 @@
                         </a:defRPr>
                       </a:pPr>
                       <a:r>
-                        <a:t>A full balayage, a soft blonde smudge at the root, finished with a long, layered, angled cut. This is what we love most: color and cut working together, not as two separate servic…</a:t>
+                        <a:t>A classic French twist, done properly. There's a reason this style has never gone out of fashion. It's polished without trying too hard, elegant without being fussy, and it holds…</a:t>
                       </a:r>
                     </a:p>
                   </a:txBody>
@@ -12519,7 +12519,7 @@
                         </a:defRPr>
                       </a:pPr>
                       <a:r>
-                        <a:t>Sep 08</a:t>
+                        <a:t>Sep 13</a:t>
                       </a:r>
                     </a:p>
                   </a:txBody>
@@ -12543,7 +12543,7 @@
                         </a:defRPr>
                       </a:pPr>
                       <a:r>
-                        <a:t>108</a:t>
+                        <a:t>115</a:t>
                       </a:r>
                     </a:p>
                   </a:txBody>
@@ -12567,7 +12567,7 @@
                         </a:defRPr>
                       </a:pPr>
                       <a:r>
-                        <a:t>4</a:t>
+                        <a:t>0</a:t>
                       </a:r>
                     </a:p>
                   </a:txBody>
